--- a/downloads/sgl-poster-a0-light.pptx
+++ b/downloads/sgl-poster-a0-light.pptx
@@ -3753,27 +3753,27 @@
                 <a:ea typeface="Pretendard" pitchFamily="34" charset="-122"/>
                 <a:cs typeface="Pretendard" pitchFamily="34" charset="-120"/>
               </a:rPr>
+              <a:t>전화번호 자리</a:t>
+            </a:r>
+            <a:endParaRPr lang="ko-KR" sz="2200" dirty="0"/>
+          </a:p>
+          <a:p>
+            <a:pPr algn="l" indent="0" marL="0">
+              <a:lnSpc>
+                <a:spcPct val="140000"/>
+              </a:lnSpc>
+              <a:buNone/>
+            </a:pPr>
+            <a:r>
+              <a:rPr lang="ko-KR" altLang="en-US" sz="2200" dirty="0">
+                <a:solidFill>
+                  <a:srgbClr val="6B6B73"/>
+                </a:solidFill>
+                <a:latin typeface="Pretendard" pitchFamily="34" charset="0"/>
+                <a:ea typeface="Pretendard" pitchFamily="34" charset="-122"/>
+                <a:cs typeface="Pretendard" pitchFamily="34" charset="-120"/>
+              </a:rPr>
               <a:t>홈페이지 주소 자리</a:t>
-            </a:r>
-            <a:endParaRPr lang="ko-KR" sz="2200" dirty="0"/>
-          </a:p>
-          <a:p>
-            <a:pPr algn="l" indent="0" marL="0">
-              <a:lnSpc>
-                <a:spcPct val="140000"/>
-              </a:lnSpc>
-              <a:buNone/>
-            </a:pPr>
-            <a:r>
-              <a:rPr lang="ko-KR" altLang="en-US" sz="2200" dirty="0">
-                <a:solidFill>
-                  <a:srgbClr val="6B6B73"/>
-                </a:solidFill>
-                <a:latin typeface="Pretendard" pitchFamily="34" charset="0"/>
-                <a:ea typeface="Pretendard" pitchFamily="34" charset="-122"/>
-                <a:cs typeface="Pretendard" pitchFamily="34" charset="-120"/>
-              </a:rPr>
-              <a:t>코드 · 데이터 링크 자리</a:t>
             </a:r>
             <a:endParaRPr lang="ko-KR" sz="2200" dirty="0"/>
           </a:p>
@@ -7094,27 +7094,27 @@
                 <a:ea typeface="Pretendard" pitchFamily="34" charset="-122"/>
                 <a:cs typeface="Pretendard" pitchFamily="34" charset="-120"/>
               </a:rPr>
+              <a:t>전화번호 자리</a:t>
+            </a:r>
+            <a:endParaRPr lang="ko-KR" sz="2200" dirty="0"/>
+          </a:p>
+          <a:p>
+            <a:pPr algn="l" indent="0" marL="0">
+              <a:lnSpc>
+                <a:spcPct val="140000"/>
+              </a:lnSpc>
+              <a:buNone/>
+            </a:pPr>
+            <a:r>
+              <a:rPr lang="ko-KR" altLang="en-US" sz="2200" dirty="0">
+                <a:solidFill>
+                  <a:srgbClr val="6B6B73"/>
+                </a:solidFill>
+                <a:latin typeface="Pretendard" pitchFamily="34" charset="0"/>
+                <a:ea typeface="Pretendard" pitchFamily="34" charset="-122"/>
+                <a:cs typeface="Pretendard" pitchFamily="34" charset="-120"/>
+              </a:rPr>
               <a:t>홈페이지 주소 자리</a:t>
-            </a:r>
-            <a:endParaRPr lang="ko-KR" sz="2200" dirty="0"/>
-          </a:p>
-          <a:p>
-            <a:pPr algn="l" indent="0" marL="0">
-              <a:lnSpc>
-                <a:spcPct val="140000"/>
-              </a:lnSpc>
-              <a:buNone/>
-            </a:pPr>
-            <a:r>
-              <a:rPr lang="ko-KR" altLang="en-US" sz="2200" dirty="0">
-                <a:solidFill>
-                  <a:srgbClr val="6B6B73"/>
-                </a:solidFill>
-                <a:latin typeface="Pretendard" pitchFamily="34" charset="0"/>
-                <a:ea typeface="Pretendard" pitchFamily="34" charset="-122"/>
-                <a:cs typeface="Pretendard" pitchFamily="34" charset="-120"/>
-              </a:rPr>
-              <a:t>코드 · 데이터 링크 자리</a:t>
             </a:r>
             <a:endParaRPr lang="ko-KR" sz="2200" dirty="0"/>
           </a:p>
